--- a/slides/big_data/1.2_Introduction_to_Big_Data.pptx
+++ b/slides/big_data/1.2_Introduction_to_Big_Data.pptx
@@ -222,7 +222,7 @@
           <a:p>
             <a:fld id="{4701986F-2A69-6944-A5AA-E18175DD8AD7}" type="datetimeFigureOut">
               <a:rPr lang="en-US" smtClean="0"/>
-              <a:t>5/3/22</a:t>
+              <a:t>9/18/23</a:t>
             </a:fld>
             <a:endParaRPr lang="en-US"/>
           </a:p>
@@ -7122,9 +7122,14 @@
           <a:lstStyle/>
           <a:p>
             <a:r>
-              <a:rPr lang="en-US"/>
-              <a:t>Mahmoud (Max) Parsian</a:t>
-            </a:r>
+              <a:rPr lang="en-US" dirty="0"/>
+              <a:t>Mahmoud </a:t>
+            </a:r>
+            <a:r>
+              <a:rPr lang="en-US" dirty="0" err="1"/>
+              <a:t>Parsian</a:t>
+            </a:r>
+            <a:endParaRPr lang="en-US" dirty="0"/>
           </a:p>
           <a:p>
             <a:r>

--- a/slides/big_data/1.2_Introduction_to_Big_Data.pptx
+++ b/slides/big_data/1.2_Introduction_to_Big_Data.pptx
@@ -222,7 +222,7 @@
           <a:p>
             <a:fld id="{4701986F-2A69-6944-A5AA-E18175DD8AD7}" type="datetimeFigureOut">
               <a:rPr lang="en-US" smtClean="0"/>
-              <a:t>9/18/23</a:t>
+              <a:t>7/14/26</a:t>
             </a:fld>
             <a:endParaRPr lang="en-US"/>
           </a:p>
@@ -8955,6 +8955,39 @@
                 <a:latin typeface="Courier" pitchFamily="2" charset="0"/>
               </a:rPr>
               <a:t>/project23/”</a:t>
+            </a:r>
+          </a:p>
+          <a:p>
+            <a:pPr marL="457200" indent="-457200">
+              <a:buFont typeface="+mj-lt"/>
+              <a:buAutoNum type="arabicPeriod"/>
+            </a:pPr>
+            <a:r>
+              <a:rPr lang="en-US" sz="2400" dirty="0">
+                <a:solidFill>
+                  <a:schemeClr val="tx1"/>
+                </a:solidFill>
+                <a:latin typeface="Courier" pitchFamily="2" charset="0"/>
+              </a:rPr>
+              <a:t># spark: an instance of </a:t>
+            </a:r>
+            <a:r>
+              <a:rPr lang="en-US" sz="2400" b="1" dirty="0" err="1">
+                <a:solidFill>
+                  <a:schemeClr val="tx1"/>
+                </a:solidFill>
+                <a:latin typeface="Courier" pitchFamily="2" charset="0"/>
+              </a:rPr>
+              <a:t>SparkSession</a:t>
+            </a:r>
+            <a:r>
+              <a:rPr lang="en-US" sz="2400" dirty="0">
+                <a:solidFill>
+                  <a:schemeClr val="tx1"/>
+                </a:solidFill>
+                <a:latin typeface="Courier" pitchFamily="2" charset="0"/>
+              </a:rPr>
+              <a:t> object</a:t>
             </a:r>
           </a:p>
           <a:p>
